--- a/public/videos/repositories/tourism-crowd-parking-alert/tourism-crowd-parking-alert-tech-preview.pptx
+++ b/public/videos/repositories/tourism-crowd-parking-alert/tourism-crowd-parking-alert-tech-preview.pptx
@@ -134,7 +134,7 @@
           <p:cNvPr id="2" name="タイトル 1">
             <a:extLst>
               <a:ext uri="{FF2B5EF4-FFF2-40B4-BE49-F238E27FC236}">
-                <a16:creationId xmlns:a16="http://schemas.microsoft.com/office/drawing/2014/main" id="{1BB7E62E-1164-62BD-4C13-094E7C4E6C16}"/>
+                <a16:creationId xmlns:a16="http://schemas.microsoft.com/office/drawing/2014/main" id="{4DEFD77B-C374-3603-BAD7-0105EE12CF69}"/>
               </a:ext>
             </a:extLst>
           </p:cNvPr>
@@ -171,7 +171,7 @@
           <p:cNvPr id="3" name="字幕 2">
             <a:extLst>
               <a:ext uri="{FF2B5EF4-FFF2-40B4-BE49-F238E27FC236}">
-                <a16:creationId xmlns:a16="http://schemas.microsoft.com/office/drawing/2014/main" id="{38AD4918-9C79-63ED-2D36-43CD765335E9}"/>
+                <a16:creationId xmlns:a16="http://schemas.microsoft.com/office/drawing/2014/main" id="{FA62DE2B-E4D0-275F-4748-07CB549D224B}"/>
               </a:ext>
             </a:extLst>
           </p:cNvPr>
@@ -241,7 +241,7 @@
           <p:cNvPr id="4" name="日付プレースホルダー 3">
             <a:extLst>
               <a:ext uri="{FF2B5EF4-FFF2-40B4-BE49-F238E27FC236}">
-                <a16:creationId xmlns:a16="http://schemas.microsoft.com/office/drawing/2014/main" id="{B1569968-567C-7473-F2BE-6FD94BFFA41F}"/>
+                <a16:creationId xmlns:a16="http://schemas.microsoft.com/office/drawing/2014/main" id="{009BC6E1-FDF8-CD5B-9240-145300903108}"/>
               </a:ext>
             </a:extLst>
           </p:cNvPr>
@@ -257,7 +257,7 @@
           <a:bodyPr/>
           <a:lstStyle/>
           <a:p>
-            <a:fld id="{FEC38E2E-ADE7-4DC6-B49B-93D136B260F4}" type="datetimeFigureOut">
+            <a:fld id="{F5342966-6A2D-4BEB-95D6-A9161EFBBFE3}" type="datetimeFigureOut">
               <a:rPr kumimoji="1" lang="ja-JP" altLang="en-US" smtClean="0"/>
               <a:t>2026/7/30</a:t>
             </a:fld>
@@ -270,7 +270,7 @@
           <p:cNvPr id="5" name="フッター プレースホルダー 4">
             <a:extLst>
               <a:ext uri="{FF2B5EF4-FFF2-40B4-BE49-F238E27FC236}">
-                <a16:creationId xmlns:a16="http://schemas.microsoft.com/office/drawing/2014/main" id="{143DABD5-7046-7DC5-AEAD-19A6F5DC9252}"/>
+                <a16:creationId xmlns:a16="http://schemas.microsoft.com/office/drawing/2014/main" id="{D8536871-4C47-C214-6023-D6421FC6175E}"/>
               </a:ext>
             </a:extLst>
           </p:cNvPr>
@@ -295,7 +295,7 @@
           <p:cNvPr id="6" name="スライド番号プレースホルダー 5">
             <a:extLst>
               <a:ext uri="{FF2B5EF4-FFF2-40B4-BE49-F238E27FC236}">
-                <a16:creationId xmlns:a16="http://schemas.microsoft.com/office/drawing/2014/main" id="{3E9DD718-6630-1344-F1EA-A59C9637CA36}"/>
+                <a16:creationId xmlns:a16="http://schemas.microsoft.com/office/drawing/2014/main" id="{0D5F8E35-70A2-81EB-DF93-248862A59DC5}"/>
               </a:ext>
             </a:extLst>
           </p:cNvPr>
@@ -311,7 +311,7 @@
           <a:bodyPr/>
           <a:lstStyle/>
           <a:p>
-            <a:fld id="{4047D588-621C-49CE-8EEC-E34371F4CDC9}" type="slidenum">
+            <a:fld id="{85FCB1C8-F473-45B0-B730-48DA66A7E061}" type="slidenum">
               <a:rPr kumimoji="1" lang="ja-JP" altLang="en-US" smtClean="0"/>
               <a:t>‹#›</a:t>
             </a:fld>
@@ -322,7 +322,7 @@
     </p:spTree>
     <p:extLst>
       <p:ext uri="{BB962C8B-B14F-4D97-AF65-F5344CB8AC3E}">
-        <p14:creationId xmlns:p14="http://schemas.microsoft.com/office/powerpoint/2010/main" val="3548156197"/>
+        <p14:creationId xmlns:p14="http://schemas.microsoft.com/office/powerpoint/2010/main" val="3716444684"/>
       </p:ext>
     </p:extLst>
   </p:cSld>
@@ -354,7 +354,7 @@
           <p:cNvPr id="2" name="タイトル 1">
             <a:extLst>
               <a:ext uri="{FF2B5EF4-FFF2-40B4-BE49-F238E27FC236}">
-                <a16:creationId xmlns:a16="http://schemas.microsoft.com/office/drawing/2014/main" id="{82C3E378-B132-5DFB-58EC-A4F0FBE6B236}"/>
+                <a16:creationId xmlns:a16="http://schemas.microsoft.com/office/drawing/2014/main" id="{14BD2B43-EF7B-CF1E-5D53-6F55158E33DF}"/>
               </a:ext>
             </a:extLst>
           </p:cNvPr>
@@ -382,7 +382,7 @@
           <p:cNvPr id="3" name="縦書きテキスト プレースホルダー 2">
             <a:extLst>
               <a:ext uri="{FF2B5EF4-FFF2-40B4-BE49-F238E27FC236}">
-                <a16:creationId xmlns:a16="http://schemas.microsoft.com/office/drawing/2014/main" id="{FBD0CDA6-38A9-66E7-2D2A-D184DB40C69E}"/>
+                <a16:creationId xmlns:a16="http://schemas.microsoft.com/office/drawing/2014/main" id="{72E9B438-DF11-38DD-5E63-C68AF0BA486B}"/>
               </a:ext>
             </a:extLst>
           </p:cNvPr>
@@ -471,7 +471,7 @@
           <p:cNvPr id="4" name="日付プレースホルダー 3">
             <a:extLst>
               <a:ext uri="{FF2B5EF4-FFF2-40B4-BE49-F238E27FC236}">
-                <a16:creationId xmlns:a16="http://schemas.microsoft.com/office/drawing/2014/main" id="{6A4C4CA5-C5DF-32C0-9EBE-347CBAA8DFC6}"/>
+                <a16:creationId xmlns:a16="http://schemas.microsoft.com/office/drawing/2014/main" id="{EC1AD604-5E2F-A8DC-001F-D72DF4AB108F}"/>
               </a:ext>
             </a:extLst>
           </p:cNvPr>
@@ -487,7 +487,7 @@
           <a:bodyPr/>
           <a:lstStyle/>
           <a:p>
-            <a:fld id="{FEC38E2E-ADE7-4DC6-B49B-93D136B260F4}" type="datetimeFigureOut">
+            <a:fld id="{F5342966-6A2D-4BEB-95D6-A9161EFBBFE3}" type="datetimeFigureOut">
               <a:rPr kumimoji="1" lang="ja-JP" altLang="en-US" smtClean="0"/>
               <a:t>2026/7/30</a:t>
             </a:fld>
@@ -500,7 +500,7 @@
           <p:cNvPr id="5" name="フッター プレースホルダー 4">
             <a:extLst>
               <a:ext uri="{FF2B5EF4-FFF2-40B4-BE49-F238E27FC236}">
-                <a16:creationId xmlns:a16="http://schemas.microsoft.com/office/drawing/2014/main" id="{1B122E43-28CD-517B-5952-3298B89D239D}"/>
+                <a16:creationId xmlns:a16="http://schemas.microsoft.com/office/drawing/2014/main" id="{2AAC5E95-3894-D74C-5163-86952DB449CF}"/>
               </a:ext>
             </a:extLst>
           </p:cNvPr>
@@ -525,7 +525,7 @@
           <p:cNvPr id="6" name="スライド番号プレースホルダー 5">
             <a:extLst>
               <a:ext uri="{FF2B5EF4-FFF2-40B4-BE49-F238E27FC236}">
-                <a16:creationId xmlns:a16="http://schemas.microsoft.com/office/drawing/2014/main" id="{DF388928-DD0D-4204-8A46-DE291A218E35}"/>
+                <a16:creationId xmlns:a16="http://schemas.microsoft.com/office/drawing/2014/main" id="{43EA508A-DBC3-A2AD-FFD5-F10D473DAFA5}"/>
               </a:ext>
             </a:extLst>
           </p:cNvPr>
@@ -541,7 +541,7 @@
           <a:bodyPr/>
           <a:lstStyle/>
           <a:p>
-            <a:fld id="{4047D588-621C-49CE-8EEC-E34371F4CDC9}" type="slidenum">
+            <a:fld id="{85FCB1C8-F473-45B0-B730-48DA66A7E061}" type="slidenum">
               <a:rPr kumimoji="1" lang="ja-JP" altLang="en-US" smtClean="0"/>
               <a:t>‹#›</a:t>
             </a:fld>
@@ -552,7 +552,7 @@
     </p:spTree>
     <p:extLst>
       <p:ext uri="{BB962C8B-B14F-4D97-AF65-F5344CB8AC3E}">
-        <p14:creationId xmlns:p14="http://schemas.microsoft.com/office/powerpoint/2010/main" val="931626484"/>
+        <p14:creationId xmlns:p14="http://schemas.microsoft.com/office/powerpoint/2010/main" val="2932642778"/>
       </p:ext>
     </p:extLst>
   </p:cSld>
@@ -584,7 +584,7 @@
           <p:cNvPr id="2" name="縦書きタイトル 1">
             <a:extLst>
               <a:ext uri="{FF2B5EF4-FFF2-40B4-BE49-F238E27FC236}">
-                <a16:creationId xmlns:a16="http://schemas.microsoft.com/office/drawing/2014/main" id="{79694257-625C-EAA9-931D-0CDDC5B5CADF}"/>
+                <a16:creationId xmlns:a16="http://schemas.microsoft.com/office/drawing/2014/main" id="{97354300-0E84-4F0E-7C09-A6B472E33B2E}"/>
               </a:ext>
             </a:extLst>
           </p:cNvPr>
@@ -617,7 +617,7 @@
           <p:cNvPr id="3" name="縦書きテキスト プレースホルダー 2">
             <a:extLst>
               <a:ext uri="{FF2B5EF4-FFF2-40B4-BE49-F238E27FC236}">
-                <a16:creationId xmlns:a16="http://schemas.microsoft.com/office/drawing/2014/main" id="{6D74363B-5E77-6A4C-EED6-22B4473FEFD9}"/>
+                <a16:creationId xmlns:a16="http://schemas.microsoft.com/office/drawing/2014/main" id="{62962F7E-43A8-5D84-228E-B66F1CCA615B}"/>
               </a:ext>
             </a:extLst>
           </p:cNvPr>
@@ -711,7 +711,7 @@
           <p:cNvPr id="4" name="日付プレースホルダー 3">
             <a:extLst>
               <a:ext uri="{FF2B5EF4-FFF2-40B4-BE49-F238E27FC236}">
-                <a16:creationId xmlns:a16="http://schemas.microsoft.com/office/drawing/2014/main" id="{7B8FB3E0-16EF-8A06-2A27-D821B5B95524}"/>
+                <a16:creationId xmlns:a16="http://schemas.microsoft.com/office/drawing/2014/main" id="{FA734AA9-CE42-80B3-CBAF-07DEE2836C8C}"/>
               </a:ext>
             </a:extLst>
           </p:cNvPr>
@@ -727,7 +727,7 @@
           <a:bodyPr/>
           <a:lstStyle/>
           <a:p>
-            <a:fld id="{FEC38E2E-ADE7-4DC6-B49B-93D136B260F4}" type="datetimeFigureOut">
+            <a:fld id="{F5342966-6A2D-4BEB-95D6-A9161EFBBFE3}" type="datetimeFigureOut">
               <a:rPr kumimoji="1" lang="ja-JP" altLang="en-US" smtClean="0"/>
               <a:t>2026/7/30</a:t>
             </a:fld>
@@ -740,7 +740,7 @@
           <p:cNvPr id="5" name="フッター プレースホルダー 4">
             <a:extLst>
               <a:ext uri="{FF2B5EF4-FFF2-40B4-BE49-F238E27FC236}">
-                <a16:creationId xmlns:a16="http://schemas.microsoft.com/office/drawing/2014/main" id="{407E31FE-52B8-2A39-21F1-2AB49F63A795}"/>
+                <a16:creationId xmlns:a16="http://schemas.microsoft.com/office/drawing/2014/main" id="{6E3D19F3-D6E9-A9F6-4232-DC8A346874F4}"/>
               </a:ext>
             </a:extLst>
           </p:cNvPr>
@@ -765,7 +765,7 @@
           <p:cNvPr id="6" name="スライド番号プレースホルダー 5">
             <a:extLst>
               <a:ext uri="{FF2B5EF4-FFF2-40B4-BE49-F238E27FC236}">
-                <a16:creationId xmlns:a16="http://schemas.microsoft.com/office/drawing/2014/main" id="{F4CD1265-5217-7FDF-9062-7CF656749F5F}"/>
+                <a16:creationId xmlns:a16="http://schemas.microsoft.com/office/drawing/2014/main" id="{E6082D22-A445-8D9A-139C-91977A4C162A}"/>
               </a:ext>
             </a:extLst>
           </p:cNvPr>
@@ -781,7 +781,7 @@
           <a:bodyPr/>
           <a:lstStyle/>
           <a:p>
-            <a:fld id="{4047D588-621C-49CE-8EEC-E34371F4CDC9}" type="slidenum">
+            <a:fld id="{85FCB1C8-F473-45B0-B730-48DA66A7E061}" type="slidenum">
               <a:rPr kumimoji="1" lang="ja-JP" altLang="en-US" smtClean="0"/>
               <a:t>‹#›</a:t>
             </a:fld>
@@ -792,7 +792,7 @@
     </p:spTree>
     <p:extLst>
       <p:ext uri="{BB962C8B-B14F-4D97-AF65-F5344CB8AC3E}">
-        <p14:creationId xmlns:p14="http://schemas.microsoft.com/office/powerpoint/2010/main" val="2541431740"/>
+        <p14:creationId xmlns:p14="http://schemas.microsoft.com/office/powerpoint/2010/main" val="2637852144"/>
       </p:ext>
     </p:extLst>
   </p:cSld>
@@ -824,7 +824,7 @@
           <p:cNvPr id="2" name="タイトル 1">
             <a:extLst>
               <a:ext uri="{FF2B5EF4-FFF2-40B4-BE49-F238E27FC236}">
-                <a16:creationId xmlns:a16="http://schemas.microsoft.com/office/drawing/2014/main" id="{5F0ED34A-DCFF-85AF-07AE-EBCF1D0588DC}"/>
+                <a16:creationId xmlns:a16="http://schemas.microsoft.com/office/drawing/2014/main" id="{0B7BDC77-AC74-BD43-C142-A00332BA8635}"/>
               </a:ext>
             </a:extLst>
           </p:cNvPr>
@@ -852,7 +852,7 @@
           <p:cNvPr id="3" name="コンテンツ プレースホルダー 2">
             <a:extLst>
               <a:ext uri="{FF2B5EF4-FFF2-40B4-BE49-F238E27FC236}">
-                <a16:creationId xmlns:a16="http://schemas.microsoft.com/office/drawing/2014/main" id="{A9B82DE7-B9C3-467B-545F-B9D68C316E5A}"/>
+                <a16:creationId xmlns:a16="http://schemas.microsoft.com/office/drawing/2014/main" id="{BB7E2711-A8C5-7FA3-DE75-DB0DBF45AC99}"/>
               </a:ext>
             </a:extLst>
           </p:cNvPr>
@@ -941,7 +941,7 @@
           <p:cNvPr id="4" name="日付プレースホルダー 3">
             <a:extLst>
               <a:ext uri="{FF2B5EF4-FFF2-40B4-BE49-F238E27FC236}">
-                <a16:creationId xmlns:a16="http://schemas.microsoft.com/office/drawing/2014/main" id="{B5D2F63B-EF21-CFE2-D325-A44983158DF6}"/>
+                <a16:creationId xmlns:a16="http://schemas.microsoft.com/office/drawing/2014/main" id="{ED8DA656-F733-8031-1481-41689CB0AF37}"/>
               </a:ext>
             </a:extLst>
           </p:cNvPr>
@@ -957,7 +957,7 @@
           <a:bodyPr/>
           <a:lstStyle/>
           <a:p>
-            <a:fld id="{FEC38E2E-ADE7-4DC6-B49B-93D136B260F4}" type="datetimeFigureOut">
+            <a:fld id="{F5342966-6A2D-4BEB-95D6-A9161EFBBFE3}" type="datetimeFigureOut">
               <a:rPr kumimoji="1" lang="ja-JP" altLang="en-US" smtClean="0"/>
               <a:t>2026/7/30</a:t>
             </a:fld>
@@ -970,7 +970,7 @@
           <p:cNvPr id="5" name="フッター プレースホルダー 4">
             <a:extLst>
               <a:ext uri="{FF2B5EF4-FFF2-40B4-BE49-F238E27FC236}">
-                <a16:creationId xmlns:a16="http://schemas.microsoft.com/office/drawing/2014/main" id="{C46B21C8-777E-FD56-6747-12DA0CF72516}"/>
+                <a16:creationId xmlns:a16="http://schemas.microsoft.com/office/drawing/2014/main" id="{BEE0AC16-5B72-3CE4-F2B0-7B4997671CBF}"/>
               </a:ext>
             </a:extLst>
           </p:cNvPr>
@@ -995,7 +995,7 @@
           <p:cNvPr id="6" name="スライド番号プレースホルダー 5">
             <a:extLst>
               <a:ext uri="{FF2B5EF4-FFF2-40B4-BE49-F238E27FC236}">
-                <a16:creationId xmlns:a16="http://schemas.microsoft.com/office/drawing/2014/main" id="{09CFD5A8-EF2C-9D5D-2736-F89D9523C00C}"/>
+                <a16:creationId xmlns:a16="http://schemas.microsoft.com/office/drawing/2014/main" id="{7B9F00ED-61C5-E669-26EE-3306B11104F5}"/>
               </a:ext>
             </a:extLst>
           </p:cNvPr>
@@ -1011,7 +1011,7 @@
           <a:bodyPr/>
           <a:lstStyle/>
           <a:p>
-            <a:fld id="{4047D588-621C-49CE-8EEC-E34371F4CDC9}" type="slidenum">
+            <a:fld id="{85FCB1C8-F473-45B0-B730-48DA66A7E061}" type="slidenum">
               <a:rPr kumimoji="1" lang="ja-JP" altLang="en-US" smtClean="0"/>
               <a:t>‹#›</a:t>
             </a:fld>
@@ -1022,7 +1022,7 @@
     </p:spTree>
     <p:extLst>
       <p:ext uri="{BB962C8B-B14F-4D97-AF65-F5344CB8AC3E}">
-        <p14:creationId xmlns:p14="http://schemas.microsoft.com/office/powerpoint/2010/main" val="196354331"/>
+        <p14:creationId xmlns:p14="http://schemas.microsoft.com/office/powerpoint/2010/main" val="2609825986"/>
       </p:ext>
     </p:extLst>
   </p:cSld>
@@ -1054,7 +1054,7 @@
           <p:cNvPr id="2" name="タイトル 1">
             <a:extLst>
               <a:ext uri="{FF2B5EF4-FFF2-40B4-BE49-F238E27FC236}">
-                <a16:creationId xmlns:a16="http://schemas.microsoft.com/office/drawing/2014/main" id="{36EF5AEE-94CE-E15E-BDA2-EEC4D13096AB}"/>
+                <a16:creationId xmlns:a16="http://schemas.microsoft.com/office/drawing/2014/main" id="{4930512A-F506-CCAF-EF2A-464C7FEC35F7}"/>
               </a:ext>
             </a:extLst>
           </p:cNvPr>
@@ -1091,7 +1091,7 @@
           <p:cNvPr id="3" name="テキスト プレースホルダー 2">
             <a:extLst>
               <a:ext uri="{FF2B5EF4-FFF2-40B4-BE49-F238E27FC236}">
-                <a16:creationId xmlns:a16="http://schemas.microsoft.com/office/drawing/2014/main" id="{8337CB06-242A-FA58-C125-AD87DCB6A70F}"/>
+                <a16:creationId xmlns:a16="http://schemas.microsoft.com/office/drawing/2014/main" id="{A946DEDE-7B60-7FEF-745E-9CB64708C47B}"/>
               </a:ext>
             </a:extLst>
           </p:cNvPr>
@@ -1216,7 +1216,7 @@
           <p:cNvPr id="4" name="日付プレースホルダー 3">
             <a:extLst>
               <a:ext uri="{FF2B5EF4-FFF2-40B4-BE49-F238E27FC236}">
-                <a16:creationId xmlns:a16="http://schemas.microsoft.com/office/drawing/2014/main" id="{49751EB4-273E-B3E1-E741-496ECBB1EBF9}"/>
+                <a16:creationId xmlns:a16="http://schemas.microsoft.com/office/drawing/2014/main" id="{DD3CDA5C-E2E7-887C-079B-36C23DFF304A}"/>
               </a:ext>
             </a:extLst>
           </p:cNvPr>
@@ -1232,7 +1232,7 @@
           <a:bodyPr/>
           <a:lstStyle/>
           <a:p>
-            <a:fld id="{FEC38E2E-ADE7-4DC6-B49B-93D136B260F4}" type="datetimeFigureOut">
+            <a:fld id="{F5342966-6A2D-4BEB-95D6-A9161EFBBFE3}" type="datetimeFigureOut">
               <a:rPr kumimoji="1" lang="ja-JP" altLang="en-US" smtClean="0"/>
               <a:t>2026/7/30</a:t>
             </a:fld>
@@ -1245,7 +1245,7 @@
           <p:cNvPr id="5" name="フッター プレースホルダー 4">
             <a:extLst>
               <a:ext uri="{FF2B5EF4-FFF2-40B4-BE49-F238E27FC236}">
-                <a16:creationId xmlns:a16="http://schemas.microsoft.com/office/drawing/2014/main" id="{713110F4-4B46-5415-48AF-502BFE123FE0}"/>
+                <a16:creationId xmlns:a16="http://schemas.microsoft.com/office/drawing/2014/main" id="{69B82C55-DB0C-4A89-C550-ACD2705CE7C8}"/>
               </a:ext>
             </a:extLst>
           </p:cNvPr>
@@ -1270,7 +1270,7 @@
           <p:cNvPr id="6" name="スライド番号プレースホルダー 5">
             <a:extLst>
               <a:ext uri="{FF2B5EF4-FFF2-40B4-BE49-F238E27FC236}">
-                <a16:creationId xmlns:a16="http://schemas.microsoft.com/office/drawing/2014/main" id="{16CE8F20-3A71-1250-C416-31C7F425A628}"/>
+                <a16:creationId xmlns:a16="http://schemas.microsoft.com/office/drawing/2014/main" id="{3802AC3F-5742-5756-BB22-A12C480133BE}"/>
               </a:ext>
             </a:extLst>
           </p:cNvPr>
@@ -1286,7 +1286,7 @@
           <a:bodyPr/>
           <a:lstStyle/>
           <a:p>
-            <a:fld id="{4047D588-621C-49CE-8EEC-E34371F4CDC9}" type="slidenum">
+            <a:fld id="{85FCB1C8-F473-45B0-B730-48DA66A7E061}" type="slidenum">
               <a:rPr kumimoji="1" lang="ja-JP" altLang="en-US" smtClean="0"/>
               <a:t>‹#›</a:t>
             </a:fld>
@@ -1297,7 +1297,7 @@
     </p:spTree>
     <p:extLst>
       <p:ext uri="{BB962C8B-B14F-4D97-AF65-F5344CB8AC3E}">
-        <p14:creationId xmlns:p14="http://schemas.microsoft.com/office/powerpoint/2010/main" val="3253926519"/>
+        <p14:creationId xmlns:p14="http://schemas.microsoft.com/office/powerpoint/2010/main" val="556896828"/>
       </p:ext>
     </p:extLst>
   </p:cSld>
@@ -1329,7 +1329,7 @@
           <p:cNvPr id="2" name="タイトル 1">
             <a:extLst>
               <a:ext uri="{FF2B5EF4-FFF2-40B4-BE49-F238E27FC236}">
-                <a16:creationId xmlns:a16="http://schemas.microsoft.com/office/drawing/2014/main" id="{5114771D-4DF1-A4AF-8C29-D5EBC6B1CE15}"/>
+                <a16:creationId xmlns:a16="http://schemas.microsoft.com/office/drawing/2014/main" id="{3968CE95-3D7C-45B2-5D8F-97A91409169C}"/>
               </a:ext>
             </a:extLst>
           </p:cNvPr>
@@ -1357,7 +1357,7 @@
           <p:cNvPr id="3" name="コンテンツ プレースホルダー 2">
             <a:extLst>
               <a:ext uri="{FF2B5EF4-FFF2-40B4-BE49-F238E27FC236}">
-                <a16:creationId xmlns:a16="http://schemas.microsoft.com/office/drawing/2014/main" id="{FD5028EB-D549-4C52-392E-B36F4DC02765}"/>
+                <a16:creationId xmlns:a16="http://schemas.microsoft.com/office/drawing/2014/main" id="{97979E9D-4FB8-7BD2-AC1B-D6DBDE2E4350}"/>
               </a:ext>
             </a:extLst>
           </p:cNvPr>
@@ -1451,7 +1451,7 @@
           <p:cNvPr id="4" name="コンテンツ プレースホルダー 3">
             <a:extLst>
               <a:ext uri="{FF2B5EF4-FFF2-40B4-BE49-F238E27FC236}">
-                <a16:creationId xmlns:a16="http://schemas.microsoft.com/office/drawing/2014/main" id="{399B47A5-381C-9D2E-0C34-3EB2502F2BF1}"/>
+                <a16:creationId xmlns:a16="http://schemas.microsoft.com/office/drawing/2014/main" id="{349FE865-5497-D454-19CC-5C5DBFECB519}"/>
               </a:ext>
             </a:extLst>
           </p:cNvPr>
@@ -1545,7 +1545,7 @@
           <p:cNvPr id="5" name="日付プレースホルダー 4">
             <a:extLst>
               <a:ext uri="{FF2B5EF4-FFF2-40B4-BE49-F238E27FC236}">
-                <a16:creationId xmlns:a16="http://schemas.microsoft.com/office/drawing/2014/main" id="{E96F1CAD-9F76-E76D-4D6B-DA076D382A65}"/>
+                <a16:creationId xmlns:a16="http://schemas.microsoft.com/office/drawing/2014/main" id="{E6AAA283-7AD8-8CB9-81BA-EEF95E0F4037}"/>
               </a:ext>
             </a:extLst>
           </p:cNvPr>
@@ -1561,7 +1561,7 @@
           <a:bodyPr/>
           <a:lstStyle/>
           <a:p>
-            <a:fld id="{FEC38E2E-ADE7-4DC6-B49B-93D136B260F4}" type="datetimeFigureOut">
+            <a:fld id="{F5342966-6A2D-4BEB-95D6-A9161EFBBFE3}" type="datetimeFigureOut">
               <a:rPr kumimoji="1" lang="ja-JP" altLang="en-US" smtClean="0"/>
               <a:t>2026/7/30</a:t>
             </a:fld>
@@ -1574,7 +1574,7 @@
           <p:cNvPr id="6" name="フッター プレースホルダー 5">
             <a:extLst>
               <a:ext uri="{FF2B5EF4-FFF2-40B4-BE49-F238E27FC236}">
-                <a16:creationId xmlns:a16="http://schemas.microsoft.com/office/drawing/2014/main" id="{9D84BE4E-5A54-9B0C-E40F-538C6B8C0E3E}"/>
+                <a16:creationId xmlns:a16="http://schemas.microsoft.com/office/drawing/2014/main" id="{EC0C50EC-05C5-E59F-7A5B-FD617626EA8D}"/>
               </a:ext>
             </a:extLst>
           </p:cNvPr>
@@ -1599,7 +1599,7 @@
           <p:cNvPr id="7" name="スライド番号プレースホルダー 6">
             <a:extLst>
               <a:ext uri="{FF2B5EF4-FFF2-40B4-BE49-F238E27FC236}">
-                <a16:creationId xmlns:a16="http://schemas.microsoft.com/office/drawing/2014/main" id="{2BD3C3C7-C191-FBF5-98E4-53C4D1195276}"/>
+                <a16:creationId xmlns:a16="http://schemas.microsoft.com/office/drawing/2014/main" id="{61620386-5713-CE65-A470-CA529835BF1C}"/>
               </a:ext>
             </a:extLst>
           </p:cNvPr>
@@ -1615,7 +1615,7 @@
           <a:bodyPr/>
           <a:lstStyle/>
           <a:p>
-            <a:fld id="{4047D588-621C-49CE-8EEC-E34371F4CDC9}" type="slidenum">
+            <a:fld id="{85FCB1C8-F473-45B0-B730-48DA66A7E061}" type="slidenum">
               <a:rPr kumimoji="1" lang="ja-JP" altLang="en-US" smtClean="0"/>
               <a:t>‹#›</a:t>
             </a:fld>
@@ -1626,7 +1626,7 @@
     </p:spTree>
     <p:extLst>
       <p:ext uri="{BB962C8B-B14F-4D97-AF65-F5344CB8AC3E}">
-        <p14:creationId xmlns:p14="http://schemas.microsoft.com/office/powerpoint/2010/main" val="1576733002"/>
+        <p14:creationId xmlns:p14="http://schemas.microsoft.com/office/powerpoint/2010/main" val="1762380088"/>
       </p:ext>
     </p:extLst>
   </p:cSld>
@@ -1658,7 +1658,7 @@
           <p:cNvPr id="2" name="タイトル 1">
             <a:extLst>
               <a:ext uri="{FF2B5EF4-FFF2-40B4-BE49-F238E27FC236}">
-                <a16:creationId xmlns:a16="http://schemas.microsoft.com/office/drawing/2014/main" id="{212C1C1E-EF4A-A65D-85D7-821F61836180}"/>
+                <a16:creationId xmlns:a16="http://schemas.microsoft.com/office/drawing/2014/main" id="{2D118772-39F1-3CF9-B3BD-4301794CCBCE}"/>
               </a:ext>
             </a:extLst>
           </p:cNvPr>
@@ -1691,7 +1691,7 @@
           <p:cNvPr id="3" name="テキスト プレースホルダー 2">
             <a:extLst>
               <a:ext uri="{FF2B5EF4-FFF2-40B4-BE49-F238E27FC236}">
-                <a16:creationId xmlns:a16="http://schemas.microsoft.com/office/drawing/2014/main" id="{85619EED-2F80-97CB-7D8D-FA234E64CF39}"/>
+                <a16:creationId xmlns:a16="http://schemas.microsoft.com/office/drawing/2014/main" id="{85CBBDD4-D14A-E178-A1E8-417DFACC37CD}"/>
               </a:ext>
             </a:extLst>
           </p:cNvPr>
@@ -1762,7 +1762,7 @@
           <p:cNvPr id="4" name="コンテンツ プレースホルダー 3">
             <a:extLst>
               <a:ext uri="{FF2B5EF4-FFF2-40B4-BE49-F238E27FC236}">
-                <a16:creationId xmlns:a16="http://schemas.microsoft.com/office/drawing/2014/main" id="{8608DF83-A8BA-340E-1A41-0094AE3D29CC}"/>
+                <a16:creationId xmlns:a16="http://schemas.microsoft.com/office/drawing/2014/main" id="{3F264FA6-E29A-5BDB-60B1-7F2BDAE0926E}"/>
               </a:ext>
             </a:extLst>
           </p:cNvPr>
@@ -1856,7 +1856,7 @@
           <p:cNvPr id="5" name="テキスト プレースホルダー 4">
             <a:extLst>
               <a:ext uri="{FF2B5EF4-FFF2-40B4-BE49-F238E27FC236}">
-                <a16:creationId xmlns:a16="http://schemas.microsoft.com/office/drawing/2014/main" id="{24087E67-E93E-0211-6CF8-A12273047084}"/>
+                <a16:creationId xmlns:a16="http://schemas.microsoft.com/office/drawing/2014/main" id="{35EE20BA-0741-B163-05AA-F24F4C781D70}"/>
               </a:ext>
             </a:extLst>
           </p:cNvPr>
@@ -1927,7 +1927,7 @@
           <p:cNvPr id="6" name="コンテンツ プレースホルダー 5">
             <a:extLst>
               <a:ext uri="{FF2B5EF4-FFF2-40B4-BE49-F238E27FC236}">
-                <a16:creationId xmlns:a16="http://schemas.microsoft.com/office/drawing/2014/main" id="{1E890F64-9C64-D5C6-6FA5-412FE3FD5615}"/>
+                <a16:creationId xmlns:a16="http://schemas.microsoft.com/office/drawing/2014/main" id="{8F3B6048-21A1-BCE4-B002-24A0BCC17203}"/>
               </a:ext>
             </a:extLst>
           </p:cNvPr>
@@ -2021,7 +2021,7 @@
           <p:cNvPr id="7" name="日付プレースホルダー 6">
             <a:extLst>
               <a:ext uri="{FF2B5EF4-FFF2-40B4-BE49-F238E27FC236}">
-                <a16:creationId xmlns:a16="http://schemas.microsoft.com/office/drawing/2014/main" id="{03200C72-9293-F72F-B189-257D05B8BCFA}"/>
+                <a16:creationId xmlns:a16="http://schemas.microsoft.com/office/drawing/2014/main" id="{8B43F7BB-6F2E-14D8-1529-6D0C2B47F61E}"/>
               </a:ext>
             </a:extLst>
           </p:cNvPr>
@@ -2037,7 +2037,7 @@
           <a:bodyPr/>
           <a:lstStyle/>
           <a:p>
-            <a:fld id="{FEC38E2E-ADE7-4DC6-B49B-93D136B260F4}" type="datetimeFigureOut">
+            <a:fld id="{F5342966-6A2D-4BEB-95D6-A9161EFBBFE3}" type="datetimeFigureOut">
               <a:rPr kumimoji="1" lang="ja-JP" altLang="en-US" smtClean="0"/>
               <a:t>2026/7/30</a:t>
             </a:fld>
@@ -2050,7 +2050,7 @@
           <p:cNvPr id="8" name="フッター プレースホルダー 7">
             <a:extLst>
               <a:ext uri="{FF2B5EF4-FFF2-40B4-BE49-F238E27FC236}">
-                <a16:creationId xmlns:a16="http://schemas.microsoft.com/office/drawing/2014/main" id="{EA12D5AD-85B5-D44A-5B8E-4841826725A1}"/>
+                <a16:creationId xmlns:a16="http://schemas.microsoft.com/office/drawing/2014/main" id="{C583CC18-1F32-AE09-EA9F-CD03058306A3}"/>
               </a:ext>
             </a:extLst>
           </p:cNvPr>
@@ -2075,7 +2075,7 @@
           <p:cNvPr id="9" name="スライド番号プレースホルダー 8">
             <a:extLst>
               <a:ext uri="{FF2B5EF4-FFF2-40B4-BE49-F238E27FC236}">
-                <a16:creationId xmlns:a16="http://schemas.microsoft.com/office/drawing/2014/main" id="{4EF74296-D9DA-F1D0-0979-2E7BFAF9A19A}"/>
+                <a16:creationId xmlns:a16="http://schemas.microsoft.com/office/drawing/2014/main" id="{6C0CA243-431A-C22E-8966-31B49E02595E}"/>
               </a:ext>
             </a:extLst>
           </p:cNvPr>
@@ -2091,7 +2091,7 @@
           <a:bodyPr/>
           <a:lstStyle/>
           <a:p>
-            <a:fld id="{4047D588-621C-49CE-8EEC-E34371F4CDC9}" type="slidenum">
+            <a:fld id="{85FCB1C8-F473-45B0-B730-48DA66A7E061}" type="slidenum">
               <a:rPr kumimoji="1" lang="ja-JP" altLang="en-US" smtClean="0"/>
               <a:t>‹#›</a:t>
             </a:fld>
@@ -2102,7 +2102,7 @@
     </p:spTree>
     <p:extLst>
       <p:ext uri="{BB962C8B-B14F-4D97-AF65-F5344CB8AC3E}">
-        <p14:creationId xmlns:p14="http://schemas.microsoft.com/office/powerpoint/2010/main" val="2841252416"/>
+        <p14:creationId xmlns:p14="http://schemas.microsoft.com/office/powerpoint/2010/main" val="2582705589"/>
       </p:ext>
     </p:extLst>
   </p:cSld>
@@ -2134,7 +2134,7 @@
           <p:cNvPr id="2" name="タイトル 1">
             <a:extLst>
               <a:ext uri="{FF2B5EF4-FFF2-40B4-BE49-F238E27FC236}">
-                <a16:creationId xmlns:a16="http://schemas.microsoft.com/office/drawing/2014/main" id="{0B1C8254-CB82-091C-85F7-D7B7FC343441}"/>
+                <a16:creationId xmlns:a16="http://schemas.microsoft.com/office/drawing/2014/main" id="{DF5FD5FC-D7BF-2ADF-A08E-E195CE680075}"/>
               </a:ext>
             </a:extLst>
           </p:cNvPr>
@@ -2162,7 +2162,7 @@
           <p:cNvPr id="3" name="日付プレースホルダー 2">
             <a:extLst>
               <a:ext uri="{FF2B5EF4-FFF2-40B4-BE49-F238E27FC236}">
-                <a16:creationId xmlns:a16="http://schemas.microsoft.com/office/drawing/2014/main" id="{1FF7423C-B202-F43A-7519-2762F36F1738}"/>
+                <a16:creationId xmlns:a16="http://schemas.microsoft.com/office/drawing/2014/main" id="{DE5842DB-7834-5BF7-9628-8EDBA18CF41F}"/>
               </a:ext>
             </a:extLst>
           </p:cNvPr>
@@ -2178,7 +2178,7 @@
           <a:bodyPr/>
           <a:lstStyle/>
           <a:p>
-            <a:fld id="{FEC38E2E-ADE7-4DC6-B49B-93D136B260F4}" type="datetimeFigureOut">
+            <a:fld id="{F5342966-6A2D-4BEB-95D6-A9161EFBBFE3}" type="datetimeFigureOut">
               <a:rPr kumimoji="1" lang="ja-JP" altLang="en-US" smtClean="0"/>
               <a:t>2026/7/30</a:t>
             </a:fld>
@@ -2191,7 +2191,7 @@
           <p:cNvPr id="4" name="フッター プレースホルダー 3">
             <a:extLst>
               <a:ext uri="{FF2B5EF4-FFF2-40B4-BE49-F238E27FC236}">
-                <a16:creationId xmlns:a16="http://schemas.microsoft.com/office/drawing/2014/main" id="{FE3A3955-1A8E-CE0A-A104-47AAABB5AD34}"/>
+                <a16:creationId xmlns:a16="http://schemas.microsoft.com/office/drawing/2014/main" id="{228DF153-980A-34EB-6F54-D660CDFDA310}"/>
               </a:ext>
             </a:extLst>
           </p:cNvPr>
@@ -2216,7 +2216,7 @@
           <p:cNvPr id="5" name="スライド番号プレースホルダー 4">
             <a:extLst>
               <a:ext uri="{FF2B5EF4-FFF2-40B4-BE49-F238E27FC236}">
-                <a16:creationId xmlns:a16="http://schemas.microsoft.com/office/drawing/2014/main" id="{0C5E2AFA-0CE3-A96A-C224-249663924610}"/>
+                <a16:creationId xmlns:a16="http://schemas.microsoft.com/office/drawing/2014/main" id="{58666036-37DB-C6FF-F255-95C557F756F4}"/>
               </a:ext>
             </a:extLst>
           </p:cNvPr>
@@ -2232,7 +2232,7 @@
           <a:bodyPr/>
           <a:lstStyle/>
           <a:p>
-            <a:fld id="{4047D588-621C-49CE-8EEC-E34371F4CDC9}" type="slidenum">
+            <a:fld id="{85FCB1C8-F473-45B0-B730-48DA66A7E061}" type="slidenum">
               <a:rPr kumimoji="1" lang="ja-JP" altLang="en-US" smtClean="0"/>
               <a:t>‹#›</a:t>
             </a:fld>
@@ -2243,7 +2243,7 @@
     </p:spTree>
     <p:extLst>
       <p:ext uri="{BB962C8B-B14F-4D97-AF65-F5344CB8AC3E}">
-        <p14:creationId xmlns:p14="http://schemas.microsoft.com/office/powerpoint/2010/main" val="3105610575"/>
+        <p14:creationId xmlns:p14="http://schemas.microsoft.com/office/powerpoint/2010/main" val="4262887712"/>
       </p:ext>
     </p:extLst>
   </p:cSld>
@@ -2275,7 +2275,7 @@
           <p:cNvPr id="2" name="日付プレースホルダー 1">
             <a:extLst>
               <a:ext uri="{FF2B5EF4-FFF2-40B4-BE49-F238E27FC236}">
-                <a16:creationId xmlns:a16="http://schemas.microsoft.com/office/drawing/2014/main" id="{2DBEC701-30D1-C98C-1205-A42FD8460485}"/>
+                <a16:creationId xmlns:a16="http://schemas.microsoft.com/office/drawing/2014/main" id="{FC52715B-629A-BF8A-8269-BFA6DB772D90}"/>
               </a:ext>
             </a:extLst>
           </p:cNvPr>
@@ -2291,7 +2291,7 @@
           <a:bodyPr/>
           <a:lstStyle/>
           <a:p>
-            <a:fld id="{FEC38E2E-ADE7-4DC6-B49B-93D136B260F4}" type="datetimeFigureOut">
+            <a:fld id="{F5342966-6A2D-4BEB-95D6-A9161EFBBFE3}" type="datetimeFigureOut">
               <a:rPr kumimoji="1" lang="ja-JP" altLang="en-US" smtClean="0"/>
               <a:t>2026/7/30</a:t>
             </a:fld>
@@ -2304,7 +2304,7 @@
           <p:cNvPr id="3" name="フッター プレースホルダー 2">
             <a:extLst>
               <a:ext uri="{FF2B5EF4-FFF2-40B4-BE49-F238E27FC236}">
-                <a16:creationId xmlns:a16="http://schemas.microsoft.com/office/drawing/2014/main" id="{305BA308-5672-3C2A-AD2C-F7E4F12CF7F4}"/>
+                <a16:creationId xmlns:a16="http://schemas.microsoft.com/office/drawing/2014/main" id="{DB0C6900-AD74-5A89-E78B-58605AFEB8F3}"/>
               </a:ext>
             </a:extLst>
           </p:cNvPr>
@@ -2329,7 +2329,7 @@
           <p:cNvPr id="4" name="スライド番号プレースホルダー 3">
             <a:extLst>
               <a:ext uri="{FF2B5EF4-FFF2-40B4-BE49-F238E27FC236}">
-                <a16:creationId xmlns:a16="http://schemas.microsoft.com/office/drawing/2014/main" id="{802A6D61-DAEE-24AB-101E-F69D7437B286}"/>
+                <a16:creationId xmlns:a16="http://schemas.microsoft.com/office/drawing/2014/main" id="{B10BAB37-95C4-DA45-BC00-605D84CAAA6F}"/>
               </a:ext>
             </a:extLst>
           </p:cNvPr>
@@ -2345,7 +2345,7 @@
           <a:bodyPr/>
           <a:lstStyle/>
           <a:p>
-            <a:fld id="{4047D588-621C-49CE-8EEC-E34371F4CDC9}" type="slidenum">
+            <a:fld id="{85FCB1C8-F473-45B0-B730-48DA66A7E061}" type="slidenum">
               <a:rPr kumimoji="1" lang="ja-JP" altLang="en-US" smtClean="0"/>
               <a:t>‹#›</a:t>
             </a:fld>
@@ -2356,7 +2356,7 @@
     </p:spTree>
     <p:extLst>
       <p:ext uri="{BB962C8B-B14F-4D97-AF65-F5344CB8AC3E}">
-        <p14:creationId xmlns:p14="http://schemas.microsoft.com/office/powerpoint/2010/main" val="4082035248"/>
+        <p14:creationId xmlns:p14="http://schemas.microsoft.com/office/powerpoint/2010/main" val="3235876470"/>
       </p:ext>
     </p:extLst>
   </p:cSld>
@@ -2388,7 +2388,7 @@
           <p:cNvPr id="2" name="タイトル 1">
             <a:extLst>
               <a:ext uri="{FF2B5EF4-FFF2-40B4-BE49-F238E27FC236}">
-                <a16:creationId xmlns:a16="http://schemas.microsoft.com/office/drawing/2014/main" id="{BD213C96-7EB9-D21F-7F3C-BA64D4D13E8A}"/>
+                <a16:creationId xmlns:a16="http://schemas.microsoft.com/office/drawing/2014/main" id="{D7A53ACF-93C5-C5C8-907B-8C0A1A8CF1F3}"/>
               </a:ext>
             </a:extLst>
           </p:cNvPr>
@@ -2425,7 +2425,7 @@
           <p:cNvPr id="3" name="コンテンツ プレースホルダー 2">
             <a:extLst>
               <a:ext uri="{FF2B5EF4-FFF2-40B4-BE49-F238E27FC236}">
-                <a16:creationId xmlns:a16="http://schemas.microsoft.com/office/drawing/2014/main" id="{307C55CE-6AF7-216F-D6FC-BD3B182EA416}"/>
+                <a16:creationId xmlns:a16="http://schemas.microsoft.com/office/drawing/2014/main" id="{7B05061A-4D2F-B3E5-CB8B-DBF48A1370C5}"/>
               </a:ext>
             </a:extLst>
           </p:cNvPr>
@@ -2547,7 +2547,7 @@
           <p:cNvPr id="4" name="テキスト プレースホルダー 3">
             <a:extLst>
               <a:ext uri="{FF2B5EF4-FFF2-40B4-BE49-F238E27FC236}">
-                <a16:creationId xmlns:a16="http://schemas.microsoft.com/office/drawing/2014/main" id="{867B397F-0298-39D5-79B8-36411B4B5F67}"/>
+                <a16:creationId xmlns:a16="http://schemas.microsoft.com/office/drawing/2014/main" id="{461521F2-519C-28CB-B0C4-A2E31F6017E5}"/>
               </a:ext>
             </a:extLst>
           </p:cNvPr>
@@ -2618,7 +2618,7 @@
           <p:cNvPr id="5" name="日付プレースホルダー 4">
             <a:extLst>
               <a:ext uri="{FF2B5EF4-FFF2-40B4-BE49-F238E27FC236}">
-                <a16:creationId xmlns:a16="http://schemas.microsoft.com/office/drawing/2014/main" id="{AF5377FD-578A-9214-47C7-32EF98A5393E}"/>
+                <a16:creationId xmlns:a16="http://schemas.microsoft.com/office/drawing/2014/main" id="{400EF8DD-8590-DF33-D586-2198350C8455}"/>
               </a:ext>
             </a:extLst>
           </p:cNvPr>
@@ -2634,7 +2634,7 @@
           <a:bodyPr/>
           <a:lstStyle/>
           <a:p>
-            <a:fld id="{FEC38E2E-ADE7-4DC6-B49B-93D136B260F4}" type="datetimeFigureOut">
+            <a:fld id="{F5342966-6A2D-4BEB-95D6-A9161EFBBFE3}" type="datetimeFigureOut">
               <a:rPr kumimoji="1" lang="ja-JP" altLang="en-US" smtClean="0"/>
               <a:t>2026/7/30</a:t>
             </a:fld>
@@ -2647,7 +2647,7 @@
           <p:cNvPr id="6" name="フッター プレースホルダー 5">
             <a:extLst>
               <a:ext uri="{FF2B5EF4-FFF2-40B4-BE49-F238E27FC236}">
-                <a16:creationId xmlns:a16="http://schemas.microsoft.com/office/drawing/2014/main" id="{F6BEC2D5-4246-7290-618B-A41255A956C0}"/>
+                <a16:creationId xmlns:a16="http://schemas.microsoft.com/office/drawing/2014/main" id="{E64A2E8F-B06A-D625-E192-4B0193EE07CF}"/>
               </a:ext>
             </a:extLst>
           </p:cNvPr>
@@ -2672,7 +2672,7 @@
           <p:cNvPr id="7" name="スライド番号プレースホルダー 6">
             <a:extLst>
               <a:ext uri="{FF2B5EF4-FFF2-40B4-BE49-F238E27FC236}">
-                <a16:creationId xmlns:a16="http://schemas.microsoft.com/office/drawing/2014/main" id="{1F93CDF2-0D72-0A36-97A1-6304825CBC02}"/>
+                <a16:creationId xmlns:a16="http://schemas.microsoft.com/office/drawing/2014/main" id="{CABE50B7-C6AF-A47C-90D1-51B05E80021D}"/>
               </a:ext>
             </a:extLst>
           </p:cNvPr>
@@ -2688,7 +2688,7 @@
           <a:bodyPr/>
           <a:lstStyle/>
           <a:p>
-            <a:fld id="{4047D588-621C-49CE-8EEC-E34371F4CDC9}" type="slidenum">
+            <a:fld id="{85FCB1C8-F473-45B0-B730-48DA66A7E061}" type="slidenum">
               <a:rPr kumimoji="1" lang="ja-JP" altLang="en-US" smtClean="0"/>
               <a:t>‹#›</a:t>
             </a:fld>
@@ -2699,7 +2699,7 @@
     </p:spTree>
     <p:extLst>
       <p:ext uri="{BB962C8B-B14F-4D97-AF65-F5344CB8AC3E}">
-        <p14:creationId xmlns:p14="http://schemas.microsoft.com/office/powerpoint/2010/main" val="3702044439"/>
+        <p14:creationId xmlns:p14="http://schemas.microsoft.com/office/powerpoint/2010/main" val="120876342"/>
       </p:ext>
     </p:extLst>
   </p:cSld>
@@ -2731,7 +2731,7 @@
           <p:cNvPr id="2" name="タイトル 1">
             <a:extLst>
               <a:ext uri="{FF2B5EF4-FFF2-40B4-BE49-F238E27FC236}">
-                <a16:creationId xmlns:a16="http://schemas.microsoft.com/office/drawing/2014/main" id="{62715695-AAF7-E0B1-DB58-CC8B341FC6FF}"/>
+                <a16:creationId xmlns:a16="http://schemas.microsoft.com/office/drawing/2014/main" id="{0DAAC99F-769F-B86E-B10F-C37C2EB9C10D}"/>
               </a:ext>
             </a:extLst>
           </p:cNvPr>
@@ -2768,7 +2768,7 @@
           <p:cNvPr id="3" name="図プレースホルダー 2">
             <a:extLst>
               <a:ext uri="{FF2B5EF4-FFF2-40B4-BE49-F238E27FC236}">
-                <a16:creationId xmlns:a16="http://schemas.microsoft.com/office/drawing/2014/main" id="{48993A9B-0ACD-F43C-4E64-A2D6AABA506E}"/>
+                <a16:creationId xmlns:a16="http://schemas.microsoft.com/office/drawing/2014/main" id="{8838D746-C09A-B87A-BE72-ABCC08198A91}"/>
               </a:ext>
             </a:extLst>
           </p:cNvPr>
@@ -2835,7 +2835,7 @@
           <p:cNvPr id="4" name="テキスト プレースホルダー 3">
             <a:extLst>
               <a:ext uri="{FF2B5EF4-FFF2-40B4-BE49-F238E27FC236}">
-                <a16:creationId xmlns:a16="http://schemas.microsoft.com/office/drawing/2014/main" id="{0F9F16E0-C9D8-63D5-F496-2306432B6971}"/>
+                <a16:creationId xmlns:a16="http://schemas.microsoft.com/office/drawing/2014/main" id="{2635C243-4444-1424-B236-765F06B06BB5}"/>
               </a:ext>
             </a:extLst>
           </p:cNvPr>
@@ -2906,7 +2906,7 @@
           <p:cNvPr id="5" name="日付プレースホルダー 4">
             <a:extLst>
               <a:ext uri="{FF2B5EF4-FFF2-40B4-BE49-F238E27FC236}">
-                <a16:creationId xmlns:a16="http://schemas.microsoft.com/office/drawing/2014/main" id="{3920EEB3-1910-2832-BEAD-128D3008F4BF}"/>
+                <a16:creationId xmlns:a16="http://schemas.microsoft.com/office/drawing/2014/main" id="{66C4981C-2C95-6F58-FBA9-FE0868C775BD}"/>
               </a:ext>
             </a:extLst>
           </p:cNvPr>
@@ -2922,7 +2922,7 @@
           <a:bodyPr/>
           <a:lstStyle/>
           <a:p>
-            <a:fld id="{FEC38E2E-ADE7-4DC6-B49B-93D136B260F4}" type="datetimeFigureOut">
+            <a:fld id="{F5342966-6A2D-4BEB-95D6-A9161EFBBFE3}" type="datetimeFigureOut">
               <a:rPr kumimoji="1" lang="ja-JP" altLang="en-US" smtClean="0"/>
               <a:t>2026/7/30</a:t>
             </a:fld>
@@ -2935,7 +2935,7 @@
           <p:cNvPr id="6" name="フッター プレースホルダー 5">
             <a:extLst>
               <a:ext uri="{FF2B5EF4-FFF2-40B4-BE49-F238E27FC236}">
-                <a16:creationId xmlns:a16="http://schemas.microsoft.com/office/drawing/2014/main" id="{51C22F37-85C0-9A12-B57C-46C5A3FE2A62}"/>
+                <a16:creationId xmlns:a16="http://schemas.microsoft.com/office/drawing/2014/main" id="{2FB88549-62DA-D3C1-E7BB-DC2E0EA22509}"/>
               </a:ext>
             </a:extLst>
           </p:cNvPr>
@@ -2960,7 +2960,7 @@
           <p:cNvPr id="7" name="スライド番号プレースホルダー 6">
             <a:extLst>
               <a:ext uri="{FF2B5EF4-FFF2-40B4-BE49-F238E27FC236}">
-                <a16:creationId xmlns:a16="http://schemas.microsoft.com/office/drawing/2014/main" id="{CF089CF6-82D4-ABF3-35DA-106FD3EAA894}"/>
+                <a16:creationId xmlns:a16="http://schemas.microsoft.com/office/drawing/2014/main" id="{8CBA9AD7-50FE-E620-CA1E-0F88530AA89D}"/>
               </a:ext>
             </a:extLst>
           </p:cNvPr>
@@ -2976,7 +2976,7 @@
           <a:bodyPr/>
           <a:lstStyle/>
           <a:p>
-            <a:fld id="{4047D588-621C-49CE-8EEC-E34371F4CDC9}" type="slidenum">
+            <a:fld id="{85FCB1C8-F473-45B0-B730-48DA66A7E061}" type="slidenum">
               <a:rPr kumimoji="1" lang="ja-JP" altLang="en-US" smtClean="0"/>
               <a:t>‹#›</a:t>
             </a:fld>
@@ -2987,7 +2987,7 @@
     </p:spTree>
     <p:extLst>
       <p:ext uri="{BB962C8B-B14F-4D97-AF65-F5344CB8AC3E}">
-        <p14:creationId xmlns:p14="http://schemas.microsoft.com/office/powerpoint/2010/main" val="3619093137"/>
+        <p14:creationId xmlns:p14="http://schemas.microsoft.com/office/powerpoint/2010/main" val="3635756563"/>
       </p:ext>
     </p:extLst>
   </p:cSld>
@@ -3024,7 +3024,7 @@
           <p:cNvPr id="2" name="タイトル プレースホルダー 1">
             <a:extLst>
               <a:ext uri="{FF2B5EF4-FFF2-40B4-BE49-F238E27FC236}">
-                <a16:creationId xmlns:a16="http://schemas.microsoft.com/office/drawing/2014/main" id="{AD239B59-3889-66DE-563B-95041FE02126}"/>
+                <a16:creationId xmlns:a16="http://schemas.microsoft.com/office/drawing/2014/main" id="{291D35AF-2EC3-F5D3-BE9F-FF1093D97AFA}"/>
               </a:ext>
             </a:extLst>
           </p:cNvPr>
@@ -3062,7 +3062,7 @@
           <p:cNvPr id="3" name="テキスト プレースホルダー 2">
             <a:extLst>
               <a:ext uri="{FF2B5EF4-FFF2-40B4-BE49-F238E27FC236}">
-                <a16:creationId xmlns:a16="http://schemas.microsoft.com/office/drawing/2014/main" id="{022D77EF-DDB4-E2E0-180C-B86780D7C608}"/>
+                <a16:creationId xmlns:a16="http://schemas.microsoft.com/office/drawing/2014/main" id="{27762823-98C7-8F79-E418-2C5D6C52FB86}"/>
               </a:ext>
             </a:extLst>
           </p:cNvPr>
@@ -3161,7 +3161,7 @@
           <p:cNvPr id="4" name="日付プレースホルダー 3">
             <a:extLst>
               <a:ext uri="{FF2B5EF4-FFF2-40B4-BE49-F238E27FC236}">
-                <a16:creationId xmlns:a16="http://schemas.microsoft.com/office/drawing/2014/main" id="{73E810E7-AEEA-3FA1-5470-CF68DB8D9D65}"/>
+                <a16:creationId xmlns:a16="http://schemas.microsoft.com/office/drawing/2014/main" id="{DAE72BD7-AF7D-FCFE-4B64-A0B182E04C01}"/>
               </a:ext>
             </a:extLst>
           </p:cNvPr>
@@ -3195,7 +3195,7 @@
             </a:lvl1pPr>
           </a:lstStyle>
           <a:p>
-            <a:fld id="{FEC38E2E-ADE7-4DC6-B49B-93D136B260F4}" type="datetimeFigureOut">
+            <a:fld id="{F5342966-6A2D-4BEB-95D6-A9161EFBBFE3}" type="datetimeFigureOut">
               <a:rPr kumimoji="1" lang="ja-JP" altLang="en-US" smtClean="0"/>
               <a:t>2026/7/30</a:t>
             </a:fld>
@@ -3208,7 +3208,7 @@
           <p:cNvPr id="5" name="フッター プレースホルダー 4">
             <a:extLst>
               <a:ext uri="{FF2B5EF4-FFF2-40B4-BE49-F238E27FC236}">
-                <a16:creationId xmlns:a16="http://schemas.microsoft.com/office/drawing/2014/main" id="{C2234038-38A2-6A9F-0CA8-9F79CBFFAB70}"/>
+                <a16:creationId xmlns:a16="http://schemas.microsoft.com/office/drawing/2014/main" id="{9EAAF188-41AE-1EC1-8305-EFC65D5E9979}"/>
               </a:ext>
             </a:extLst>
           </p:cNvPr>
@@ -3251,7 +3251,7 @@
           <p:cNvPr id="6" name="スライド番号プレースホルダー 5">
             <a:extLst>
               <a:ext uri="{FF2B5EF4-FFF2-40B4-BE49-F238E27FC236}">
-                <a16:creationId xmlns:a16="http://schemas.microsoft.com/office/drawing/2014/main" id="{6AB99ABB-64B9-D43B-8731-B29A9A1ADE2D}"/>
+                <a16:creationId xmlns:a16="http://schemas.microsoft.com/office/drawing/2014/main" id="{722183D0-B983-907A-77B4-371ACA0D270F}"/>
               </a:ext>
             </a:extLst>
           </p:cNvPr>
@@ -3285,7 +3285,7 @@
             </a:lvl1pPr>
           </a:lstStyle>
           <a:p>
-            <a:fld id="{4047D588-621C-49CE-8EEC-E34371F4CDC9}" type="slidenum">
+            <a:fld id="{85FCB1C8-F473-45B0-B730-48DA66A7E061}" type="slidenum">
               <a:rPr kumimoji="1" lang="ja-JP" altLang="en-US" smtClean="0"/>
               <a:t>‹#›</a:t>
             </a:fld>
@@ -3296,7 +3296,7 @@
     </p:spTree>
     <p:extLst>
       <p:ext uri="{BB962C8B-B14F-4D97-AF65-F5344CB8AC3E}">
-        <p14:creationId xmlns:p14="http://schemas.microsoft.com/office/powerpoint/2010/main" val="2085863479"/>
+        <p14:creationId xmlns:p14="http://schemas.microsoft.com/office/powerpoint/2010/main" val="1108437439"/>
       </p:ext>
     </p:extLst>
   </p:cSld>
@@ -3619,7 +3619,7 @@
           <p:cNvPr id="2" name="テキスト ボックス 1">
             <a:extLst>
               <a:ext uri="{FF2B5EF4-FFF2-40B4-BE49-F238E27FC236}">
-                <a16:creationId xmlns:a16="http://schemas.microsoft.com/office/drawing/2014/main" id="{ADEBDF9A-B476-C4C9-62A8-6EF6502861B5}"/>
+                <a16:creationId xmlns:a16="http://schemas.microsoft.com/office/drawing/2014/main" id="{D4494575-87B6-C407-A774-6AE24FAE91B9}"/>
               </a:ext>
             </a:extLst>
           </p:cNvPr>
@@ -3665,7 +3665,7 @@
           <p:cNvPr id="3" name="テキスト ボックス 2">
             <a:extLst>
               <a:ext uri="{FF2B5EF4-FFF2-40B4-BE49-F238E27FC236}">
-                <a16:creationId xmlns:a16="http://schemas.microsoft.com/office/drawing/2014/main" id="{5F464392-6536-B97C-94D9-3AE442E3BF97}"/>
+                <a16:creationId xmlns:a16="http://schemas.microsoft.com/office/drawing/2014/main" id="{13941774-6155-8CDE-9AEC-4B46D0FE06DF}"/>
               </a:ext>
             </a:extLst>
           </p:cNvPr>
@@ -3714,7 +3714,7 @@
           <p:cNvPr id="4" name="テキスト ボックス 3">
             <a:extLst>
               <a:ext uri="{FF2B5EF4-FFF2-40B4-BE49-F238E27FC236}">
-                <a16:creationId xmlns:a16="http://schemas.microsoft.com/office/drawing/2014/main" id="{E8D7A6C0-6D6F-ACC1-3FA7-B8C4795AB47D}"/>
+                <a16:creationId xmlns:a16="http://schemas.microsoft.com/office/drawing/2014/main" id="{7141CA36-36B9-5836-C431-7888CE3862EA}"/>
               </a:ext>
             </a:extLst>
           </p:cNvPr>
@@ -3754,7 +3754,7 @@
           <p:cNvPr id="5" name="テキスト ボックス 4">
             <a:extLst>
               <a:ext uri="{FF2B5EF4-FFF2-40B4-BE49-F238E27FC236}">
-                <a16:creationId xmlns:a16="http://schemas.microsoft.com/office/drawing/2014/main" id="{38F75850-7BD0-EE23-2D48-8AA863BB9636}"/>
+                <a16:creationId xmlns:a16="http://schemas.microsoft.com/office/drawing/2014/main" id="{F39ADBA6-C44F-CA18-3666-59EECC44A82B}"/>
               </a:ext>
             </a:extLst>
           </p:cNvPr>
@@ -3801,7 +3801,7 @@
             <a:hlinkClick r:id="" action="ppaction://media"/>
             <a:extLst>
               <a:ext uri="{FF2B5EF4-FFF2-40B4-BE49-F238E27FC236}">
-                <a16:creationId xmlns:a16="http://schemas.microsoft.com/office/drawing/2014/main" id="{13B2DA60-87C9-0062-80D2-AB86C737F621}"/>
+                <a16:creationId xmlns:a16="http://schemas.microsoft.com/office/drawing/2014/main" id="{A2B0E08B-7741-8AC3-449D-E1F3D99C9248}"/>
               </a:ext>
             </a:extLst>
           </p:cNvPr>
@@ -3836,7 +3836,7 @@
     </p:spTree>
     <p:extLst>
       <p:ext uri="{BB962C8B-B14F-4D97-AF65-F5344CB8AC3E}">
-        <p14:creationId xmlns:p14="http://schemas.microsoft.com/office/powerpoint/2010/main" val="3753335956"/>
+        <p14:creationId xmlns:p14="http://schemas.microsoft.com/office/powerpoint/2010/main" val="481011856"/>
       </p:ext>
     </p:extLst>
   </p:cSld>
@@ -3960,7 +3960,7 @@
           <p:cNvPr id="2" name="テキスト ボックス 1">
             <a:extLst>
               <a:ext uri="{FF2B5EF4-FFF2-40B4-BE49-F238E27FC236}">
-                <a16:creationId xmlns:a16="http://schemas.microsoft.com/office/drawing/2014/main" id="{73FB29BF-03FC-B7D1-3B6E-DA36BD651B6F}"/>
+                <a16:creationId xmlns:a16="http://schemas.microsoft.com/office/drawing/2014/main" id="{1DA7562F-261D-92EF-C9CB-DCCFA3FCA386}"/>
               </a:ext>
             </a:extLst>
           </p:cNvPr>
@@ -4006,7 +4006,7 @@
           <p:cNvPr id="3" name="テキスト ボックス 2">
             <a:extLst>
               <a:ext uri="{FF2B5EF4-FFF2-40B4-BE49-F238E27FC236}">
-                <a16:creationId xmlns:a16="http://schemas.microsoft.com/office/drawing/2014/main" id="{C8A4B11B-0CF8-0C9A-9157-011B40481456}"/>
+                <a16:creationId xmlns:a16="http://schemas.microsoft.com/office/drawing/2014/main" id="{61FED669-9244-8C45-D63B-CF2EB404B705}"/>
               </a:ext>
             </a:extLst>
           </p:cNvPr>
@@ -4046,7 +4046,7 @@
           <p:cNvPr id="4" name="テキスト ボックス 3">
             <a:extLst>
               <a:ext uri="{FF2B5EF4-FFF2-40B4-BE49-F238E27FC236}">
-                <a16:creationId xmlns:a16="http://schemas.microsoft.com/office/drawing/2014/main" id="{AF49CA54-DC81-96AF-3D0A-7FF366FE6793}"/>
+                <a16:creationId xmlns:a16="http://schemas.microsoft.com/office/drawing/2014/main" id="{8C982B19-D9A4-DE2A-7DDA-6D84D8D72EC1}"/>
               </a:ext>
             </a:extLst>
           </p:cNvPr>
@@ -4110,7 +4110,7 @@
           <p:cNvPr id="5" name="テキスト ボックス 4">
             <a:extLst>
               <a:ext uri="{FF2B5EF4-FFF2-40B4-BE49-F238E27FC236}">
-                <a16:creationId xmlns:a16="http://schemas.microsoft.com/office/drawing/2014/main" id="{23751E03-28C2-3AFB-41DB-DBCC64BDC0C9}"/>
+                <a16:creationId xmlns:a16="http://schemas.microsoft.com/office/drawing/2014/main" id="{0C7E836D-C11B-B3BE-640F-4D630C967491}"/>
               </a:ext>
             </a:extLst>
           </p:cNvPr>
@@ -4157,7 +4157,7 @@
             <a:hlinkClick r:id="" action="ppaction://media"/>
             <a:extLst>
               <a:ext uri="{FF2B5EF4-FFF2-40B4-BE49-F238E27FC236}">
-                <a16:creationId xmlns:a16="http://schemas.microsoft.com/office/drawing/2014/main" id="{D081806C-3432-1A05-9FD0-762B00A852E3}"/>
+                <a16:creationId xmlns:a16="http://schemas.microsoft.com/office/drawing/2014/main" id="{0AF6D492-D10B-F700-43FC-24D8A893412C}"/>
               </a:ext>
             </a:extLst>
           </p:cNvPr>
@@ -4192,7 +4192,7 @@
     </p:spTree>
     <p:extLst>
       <p:ext uri="{BB962C8B-B14F-4D97-AF65-F5344CB8AC3E}">
-        <p14:creationId xmlns:p14="http://schemas.microsoft.com/office/powerpoint/2010/main" val="3285167193"/>
+        <p14:creationId xmlns:p14="http://schemas.microsoft.com/office/powerpoint/2010/main" val="1141225757"/>
       </p:ext>
     </p:extLst>
   </p:cSld>
@@ -4316,7 +4316,7 @@
           <p:cNvPr id="2" name="テキスト ボックス 1">
             <a:extLst>
               <a:ext uri="{FF2B5EF4-FFF2-40B4-BE49-F238E27FC236}">
-                <a16:creationId xmlns:a16="http://schemas.microsoft.com/office/drawing/2014/main" id="{A5876C7C-850D-E635-1C16-4FF67640C56B}"/>
+                <a16:creationId xmlns:a16="http://schemas.microsoft.com/office/drawing/2014/main" id="{ABDD6ECA-B731-E4BF-53EB-75CA5AF0AC2E}"/>
               </a:ext>
             </a:extLst>
           </p:cNvPr>
@@ -4362,7 +4362,7 @@
           <p:cNvPr id="3" name="テキスト ボックス 2">
             <a:extLst>
               <a:ext uri="{FF2B5EF4-FFF2-40B4-BE49-F238E27FC236}">
-                <a16:creationId xmlns:a16="http://schemas.microsoft.com/office/drawing/2014/main" id="{A39F004B-8638-72DE-4702-3A72320312F3}"/>
+                <a16:creationId xmlns:a16="http://schemas.microsoft.com/office/drawing/2014/main" id="{7F3FD173-D57E-1F59-6CED-042203E2811E}"/>
               </a:ext>
             </a:extLst>
           </p:cNvPr>
@@ -4402,7 +4402,7 @@
           <p:cNvPr id="4" name="テキスト ボックス 3">
             <a:extLst>
               <a:ext uri="{FF2B5EF4-FFF2-40B4-BE49-F238E27FC236}">
-                <a16:creationId xmlns:a16="http://schemas.microsoft.com/office/drawing/2014/main" id="{5062F765-FBF1-43D0-58F7-A6421FDF1F1C}"/>
+                <a16:creationId xmlns:a16="http://schemas.microsoft.com/office/drawing/2014/main" id="{6D0A3F78-1E13-49D1-3F8E-7C1BEBBDC7D9}"/>
               </a:ext>
             </a:extLst>
           </p:cNvPr>
@@ -4497,7 +4497,7 @@
           <p:cNvPr id="5" name="テキスト ボックス 4">
             <a:extLst>
               <a:ext uri="{FF2B5EF4-FFF2-40B4-BE49-F238E27FC236}">
-                <a16:creationId xmlns:a16="http://schemas.microsoft.com/office/drawing/2014/main" id="{0CC9B5D1-8EC4-0C06-1FD4-45543D881BC3}"/>
+                <a16:creationId xmlns:a16="http://schemas.microsoft.com/office/drawing/2014/main" id="{C1A7F426-5A9F-552B-03C3-0ECE57ED490D}"/>
               </a:ext>
             </a:extLst>
           </p:cNvPr>
@@ -4544,7 +4544,7 @@
             <a:hlinkClick r:id="" action="ppaction://media"/>
             <a:extLst>
               <a:ext uri="{FF2B5EF4-FFF2-40B4-BE49-F238E27FC236}">
-                <a16:creationId xmlns:a16="http://schemas.microsoft.com/office/drawing/2014/main" id="{56973404-0CAF-D5FC-563B-A698E73F2ACA}"/>
+                <a16:creationId xmlns:a16="http://schemas.microsoft.com/office/drawing/2014/main" id="{FB62BEA7-E7F7-5B93-178A-8ECE24BD16FC}"/>
               </a:ext>
             </a:extLst>
           </p:cNvPr>
@@ -4579,7 +4579,7 @@
     </p:spTree>
     <p:extLst>
       <p:ext uri="{BB962C8B-B14F-4D97-AF65-F5344CB8AC3E}">
-        <p14:creationId xmlns:p14="http://schemas.microsoft.com/office/powerpoint/2010/main" val="3836416553"/>
+        <p14:creationId xmlns:p14="http://schemas.microsoft.com/office/powerpoint/2010/main" val="4265904334"/>
       </p:ext>
     </p:extLst>
   </p:cSld>
@@ -4703,7 +4703,7 @@
           <p:cNvPr id="2" name="テキスト ボックス 1">
             <a:extLst>
               <a:ext uri="{FF2B5EF4-FFF2-40B4-BE49-F238E27FC236}">
-                <a16:creationId xmlns:a16="http://schemas.microsoft.com/office/drawing/2014/main" id="{5F0C2451-1803-2B85-9EB0-19AAF1996A00}"/>
+                <a16:creationId xmlns:a16="http://schemas.microsoft.com/office/drawing/2014/main" id="{06D8CC88-B1DF-EC96-1843-414E16F12B82}"/>
               </a:ext>
             </a:extLst>
           </p:cNvPr>
@@ -4749,7 +4749,7 @@
           <p:cNvPr id="3" name="テキスト ボックス 2">
             <a:extLst>
               <a:ext uri="{FF2B5EF4-FFF2-40B4-BE49-F238E27FC236}">
-                <a16:creationId xmlns:a16="http://schemas.microsoft.com/office/drawing/2014/main" id="{E0CC7300-3DC6-6CA5-952C-0CBBBDFD864B}"/>
+                <a16:creationId xmlns:a16="http://schemas.microsoft.com/office/drawing/2014/main" id="{25F099AA-FF34-2FBC-B5FD-AFAC76AF6378}"/>
               </a:ext>
             </a:extLst>
           </p:cNvPr>
@@ -4789,7 +4789,7 @@
           <p:cNvPr id="4" name="テキスト ボックス 3">
             <a:extLst>
               <a:ext uri="{FF2B5EF4-FFF2-40B4-BE49-F238E27FC236}">
-                <a16:creationId xmlns:a16="http://schemas.microsoft.com/office/drawing/2014/main" id="{6E1046FD-973B-6619-F8C6-124284CE3FAA}"/>
+                <a16:creationId xmlns:a16="http://schemas.microsoft.com/office/drawing/2014/main" id="{9249BCFD-4B58-4B68-C177-D1C0FE540D16}"/>
               </a:ext>
             </a:extLst>
           </p:cNvPr>
@@ -4899,7 +4899,7 @@
           <p:cNvPr id="5" name="テキスト ボックス 4">
             <a:extLst>
               <a:ext uri="{FF2B5EF4-FFF2-40B4-BE49-F238E27FC236}">
-                <a16:creationId xmlns:a16="http://schemas.microsoft.com/office/drawing/2014/main" id="{69CA7935-FB3E-CAD4-54DD-7801CF9BB4CF}"/>
+                <a16:creationId xmlns:a16="http://schemas.microsoft.com/office/drawing/2014/main" id="{D54ABEFE-6471-BF01-9475-E6BB33E31BDA}"/>
               </a:ext>
             </a:extLst>
           </p:cNvPr>
@@ -4946,7 +4946,7 @@
             <a:hlinkClick r:id="" action="ppaction://media"/>
             <a:extLst>
               <a:ext uri="{FF2B5EF4-FFF2-40B4-BE49-F238E27FC236}">
-                <a16:creationId xmlns:a16="http://schemas.microsoft.com/office/drawing/2014/main" id="{7C220207-1D4D-27FF-E9C8-63927527ACD2}"/>
+                <a16:creationId xmlns:a16="http://schemas.microsoft.com/office/drawing/2014/main" id="{C0AF3ECC-8D28-BA1D-7D1B-5D12A1ED1A06}"/>
               </a:ext>
             </a:extLst>
           </p:cNvPr>
@@ -4981,7 +4981,7 @@
     </p:spTree>
     <p:extLst>
       <p:ext uri="{BB962C8B-B14F-4D97-AF65-F5344CB8AC3E}">
-        <p14:creationId xmlns:p14="http://schemas.microsoft.com/office/powerpoint/2010/main" val="2223933139"/>
+        <p14:creationId xmlns:p14="http://schemas.microsoft.com/office/powerpoint/2010/main" val="533865486"/>
       </p:ext>
     </p:extLst>
   </p:cSld>
@@ -5105,7 +5105,7 @@
           <p:cNvPr id="2" name="テキスト ボックス 1">
             <a:extLst>
               <a:ext uri="{FF2B5EF4-FFF2-40B4-BE49-F238E27FC236}">
-                <a16:creationId xmlns:a16="http://schemas.microsoft.com/office/drawing/2014/main" id="{68947AAA-E712-8825-09DC-5E34E548D313}"/>
+                <a16:creationId xmlns:a16="http://schemas.microsoft.com/office/drawing/2014/main" id="{9A897EC9-49FF-A832-B61D-6BA55DB16170}"/>
               </a:ext>
             </a:extLst>
           </p:cNvPr>
@@ -5151,7 +5151,7 @@
           <p:cNvPr id="3" name="テキスト ボックス 2">
             <a:extLst>
               <a:ext uri="{FF2B5EF4-FFF2-40B4-BE49-F238E27FC236}">
-                <a16:creationId xmlns:a16="http://schemas.microsoft.com/office/drawing/2014/main" id="{EA50E4A6-3C3A-E6D9-E51D-D32B068751F5}"/>
+                <a16:creationId xmlns:a16="http://schemas.microsoft.com/office/drawing/2014/main" id="{C31E648A-8D7D-2568-3000-41C28F3BEC98}"/>
               </a:ext>
             </a:extLst>
           </p:cNvPr>
@@ -5191,7 +5191,7 @@
           <p:cNvPr id="4" name="テキスト ボックス 3">
             <a:extLst>
               <a:ext uri="{FF2B5EF4-FFF2-40B4-BE49-F238E27FC236}">
-                <a16:creationId xmlns:a16="http://schemas.microsoft.com/office/drawing/2014/main" id="{AACBA14B-C90A-F503-7CB1-0CCD2A1CA628}"/>
+                <a16:creationId xmlns:a16="http://schemas.microsoft.com/office/drawing/2014/main" id="{E6406603-1EBB-E714-E8B3-4FCDD7A3C953}"/>
               </a:ext>
             </a:extLst>
           </p:cNvPr>
@@ -5215,20 +5215,14 @@
           <a:lstStyle/>
           <a:p>
             <a:r>
-              <a:rPr kumimoji="1" lang="en-US" altLang="ja-JP" sz="2000">
+              <a:rPr kumimoji="1" lang="ja-JP" altLang="en-US" sz="2000">
                 <a:solidFill>
                   <a:srgbClr val="333333"/>
                 </a:solidFill>
                 <a:latin typeface="Arial" panose="020B0604020202020204" pitchFamily="34" charset="0"/>
               </a:rPr>
-              <a:t>Set confirmed custom domain</a:t>
-            </a:r>
-            <a:endParaRPr kumimoji="1" lang="ja-JP" altLang="en-US" sz="2000">
-              <a:solidFill>
-                <a:srgbClr val="333333"/>
-              </a:solidFill>
-              <a:latin typeface="Arial" panose="020B0604020202020204" pitchFamily="34" charset="0"/>
-            </a:endParaRPr>
+              <a:t>直近のコミットでは、実装の見直しと継続的な改善が行われました。</a:t>
+            </a:r>
           </a:p>
         </p:txBody>
       </p:sp>
@@ -5237,7 +5231,7 @@
           <p:cNvPr id="5" name="テキスト ボックス 4">
             <a:extLst>
               <a:ext uri="{FF2B5EF4-FFF2-40B4-BE49-F238E27FC236}">
-                <a16:creationId xmlns:a16="http://schemas.microsoft.com/office/drawing/2014/main" id="{6DD9B809-F038-8B21-5377-681C08D18DD3}"/>
+                <a16:creationId xmlns:a16="http://schemas.microsoft.com/office/drawing/2014/main" id="{04ACE259-AB4F-8615-8BA0-827D11428E21}"/>
               </a:ext>
             </a:extLst>
           </p:cNvPr>
@@ -5284,7 +5278,7 @@
             <a:hlinkClick r:id="" action="ppaction://media"/>
             <a:extLst>
               <a:ext uri="{FF2B5EF4-FFF2-40B4-BE49-F238E27FC236}">
-                <a16:creationId xmlns:a16="http://schemas.microsoft.com/office/drawing/2014/main" id="{6D79D59F-39CF-FEC8-C65C-6F99DC28CDFC}"/>
+                <a16:creationId xmlns:a16="http://schemas.microsoft.com/office/drawing/2014/main" id="{086C49AC-84C9-4D04-2A15-2A6851D0F495}"/>
               </a:ext>
             </a:extLst>
           </p:cNvPr>
@@ -5319,7 +5313,7 @@
     </p:spTree>
     <p:extLst>
       <p:ext uri="{BB962C8B-B14F-4D97-AF65-F5344CB8AC3E}">
-        <p14:creationId xmlns:p14="http://schemas.microsoft.com/office/powerpoint/2010/main" val="3740622104"/>
+        <p14:creationId xmlns:p14="http://schemas.microsoft.com/office/powerpoint/2010/main" val="1741165607"/>
       </p:ext>
     </p:extLst>
   </p:cSld>
@@ -5362,7 +5356,7 @@
                                   <p:childTnLst>
                                     <p:cmd type="call" cmd="playFrom(0.0)">
                                       <p:cBhvr>
-                                        <p:cTn id="6" dur="6451" fill="hold"/>
+                                        <p:cTn id="6" dur="6076" fill="hold"/>
                                         <p:tgtEl>
                                           <p:spTgt spid="6"/>
                                         </p:tgtEl>
@@ -5443,7 +5437,7 @@
           <p:cNvPr id="2" name="テキスト ボックス 1">
             <a:extLst>
               <a:ext uri="{FF2B5EF4-FFF2-40B4-BE49-F238E27FC236}">
-                <a16:creationId xmlns:a16="http://schemas.microsoft.com/office/drawing/2014/main" id="{5934D444-3E10-1162-1A96-13E8845C74DF}"/>
+                <a16:creationId xmlns:a16="http://schemas.microsoft.com/office/drawing/2014/main" id="{4FF0ADCE-82D4-D997-B983-BC9EF4B2E7F0}"/>
               </a:ext>
             </a:extLst>
           </p:cNvPr>
@@ -5489,7 +5483,7 @@
           <p:cNvPr id="3" name="テキスト ボックス 2">
             <a:extLst>
               <a:ext uri="{FF2B5EF4-FFF2-40B4-BE49-F238E27FC236}">
-                <a16:creationId xmlns:a16="http://schemas.microsoft.com/office/drawing/2014/main" id="{134B46A0-FB7A-F206-B51C-6B7447C8C9B5}"/>
+                <a16:creationId xmlns:a16="http://schemas.microsoft.com/office/drawing/2014/main" id="{86F55304-E2A7-8B98-87C7-3B1AD7516404}"/>
               </a:ext>
             </a:extLst>
           </p:cNvPr>
@@ -5529,7 +5523,7 @@
           <p:cNvPr id="4" name="テキスト ボックス 3">
             <a:extLst>
               <a:ext uri="{FF2B5EF4-FFF2-40B4-BE49-F238E27FC236}">
-                <a16:creationId xmlns:a16="http://schemas.microsoft.com/office/drawing/2014/main" id="{AB17AEB8-31EF-18BB-2D2F-0F1820E66A10}"/>
+                <a16:creationId xmlns:a16="http://schemas.microsoft.com/office/drawing/2014/main" id="{1832CD83-A1C9-B635-D418-E4645A9F5D86}"/>
               </a:ext>
             </a:extLst>
           </p:cNvPr>
@@ -5594,7 +5588,7 @@
           <p:cNvPr id="5" name="テキスト ボックス 4">
             <a:extLst>
               <a:ext uri="{FF2B5EF4-FFF2-40B4-BE49-F238E27FC236}">
-                <a16:creationId xmlns:a16="http://schemas.microsoft.com/office/drawing/2014/main" id="{4F73B7D1-E2B8-92D7-5CFE-144FA05BA45B}"/>
+                <a16:creationId xmlns:a16="http://schemas.microsoft.com/office/drawing/2014/main" id="{A76EF9DD-B7AA-A611-D3BC-306CDA608AB4}"/>
               </a:ext>
             </a:extLst>
           </p:cNvPr>
@@ -5641,7 +5635,7 @@
             <a:hlinkClick r:id="" action="ppaction://media"/>
             <a:extLst>
               <a:ext uri="{FF2B5EF4-FFF2-40B4-BE49-F238E27FC236}">
-                <a16:creationId xmlns:a16="http://schemas.microsoft.com/office/drawing/2014/main" id="{F9CEC630-C695-7C2E-870E-0CF5D1171C30}"/>
+                <a16:creationId xmlns:a16="http://schemas.microsoft.com/office/drawing/2014/main" id="{5AA53E3C-BAAA-A328-409C-8DF8D70B55D4}"/>
               </a:ext>
             </a:extLst>
           </p:cNvPr>
@@ -5676,7 +5670,7 @@
     </p:spTree>
     <p:extLst>
       <p:ext uri="{BB962C8B-B14F-4D97-AF65-F5344CB8AC3E}">
-        <p14:creationId xmlns:p14="http://schemas.microsoft.com/office/powerpoint/2010/main" val="544460668"/>
+        <p14:creationId xmlns:p14="http://schemas.microsoft.com/office/powerpoint/2010/main" val="634336049"/>
       </p:ext>
     </p:extLst>
   </p:cSld>
